--- a/AoE_Enumerator_Orientation_QA_Protocol_August2026.pptx
+++ b/AoE_Enumerator_Orientation_QA_Protocol_August2026.pptx
@@ -321,7 +321,7 @@
           <a:p>
             <a:fld id="{5BCAD085-E8A6-8845-BD4E-CB4CCA059FC4}" type="datetimeFigureOut">
               <a:rPr lang="en-US" smtClean="0"/>
-              <a:t>8/24/2026</a:t>
+              <a:t>9/4/2026</a:t>
             </a:fld>
             <a:endParaRPr lang="en-US"/>
           </a:p>
@@ -489,7 +489,7 @@
           <a:p>
             <a:fld id="{5BCAD085-E8A6-8845-BD4E-CB4CCA059FC4}" type="datetimeFigureOut">
               <a:rPr lang="en-US" smtClean="0"/>
-              <a:t>8/24/2026</a:t>
+              <a:t>9/4/2026</a:t>
             </a:fld>
             <a:endParaRPr lang="en-US"/>
           </a:p>
@@ -667,7 +667,7 @@
           <a:p>
             <a:fld id="{5BCAD085-E8A6-8845-BD4E-CB4CCA059FC4}" type="datetimeFigureOut">
               <a:rPr lang="en-US" smtClean="0"/>
-              <a:t>8/24/2026</a:t>
+              <a:t>9/4/2026</a:t>
             </a:fld>
             <a:endParaRPr lang="en-US"/>
           </a:p>
@@ -835,7 +835,7 @@
           <a:p>
             <a:fld id="{5BCAD085-E8A6-8845-BD4E-CB4CCA059FC4}" type="datetimeFigureOut">
               <a:rPr lang="en-US" smtClean="0"/>
-              <a:t>8/24/2026</a:t>
+              <a:t>9/4/2026</a:t>
             </a:fld>
             <a:endParaRPr lang="en-US"/>
           </a:p>
@@ -1080,7 +1080,7 @@
           <a:p>
             <a:fld id="{5BCAD085-E8A6-8845-BD4E-CB4CCA059FC4}" type="datetimeFigureOut">
               <a:rPr lang="en-US" smtClean="0"/>
-              <a:t>8/24/2026</a:t>
+              <a:t>9/4/2026</a:t>
             </a:fld>
             <a:endParaRPr lang="en-US"/>
           </a:p>
@@ -1365,7 +1365,7 @@
           <a:p>
             <a:fld id="{5BCAD085-E8A6-8845-BD4E-CB4CCA059FC4}" type="datetimeFigureOut">
               <a:rPr lang="en-US" smtClean="0"/>
-              <a:t>8/24/2026</a:t>
+              <a:t>9/4/2026</a:t>
             </a:fld>
             <a:endParaRPr lang="en-US"/>
           </a:p>
@@ -1784,7 +1784,7 @@
           <a:p>
             <a:fld id="{5BCAD085-E8A6-8845-BD4E-CB4CCA059FC4}" type="datetimeFigureOut">
               <a:rPr lang="en-US" smtClean="0"/>
-              <a:t>8/24/2026</a:t>
+              <a:t>9/4/2026</a:t>
             </a:fld>
             <a:endParaRPr lang="en-US"/>
           </a:p>
@@ -1901,7 +1901,7 @@
           <a:p>
             <a:fld id="{5BCAD085-E8A6-8845-BD4E-CB4CCA059FC4}" type="datetimeFigureOut">
               <a:rPr lang="en-US" smtClean="0"/>
-              <a:t>8/24/2026</a:t>
+              <a:t>9/4/2026</a:t>
             </a:fld>
             <a:endParaRPr lang="en-US"/>
           </a:p>
@@ -1996,7 +1996,7 @@
           <a:p>
             <a:fld id="{5BCAD085-E8A6-8845-BD4E-CB4CCA059FC4}" type="datetimeFigureOut">
               <a:rPr lang="en-US" smtClean="0"/>
-              <a:t>8/24/2026</a:t>
+              <a:t>9/4/2026</a:t>
             </a:fld>
             <a:endParaRPr lang="en-US"/>
           </a:p>
@@ -2271,7 +2271,7 @@
           <a:p>
             <a:fld id="{5BCAD085-E8A6-8845-BD4E-CB4CCA059FC4}" type="datetimeFigureOut">
               <a:rPr lang="en-US" smtClean="0"/>
-              <a:t>8/24/2026</a:t>
+              <a:t>9/4/2026</a:t>
             </a:fld>
             <a:endParaRPr lang="en-US"/>
           </a:p>
@@ -2523,7 +2523,7 @@
           <a:p>
             <a:fld id="{5BCAD085-E8A6-8845-BD4E-CB4CCA059FC4}" type="datetimeFigureOut">
               <a:rPr lang="en-US" smtClean="0"/>
-              <a:t>8/24/2026</a:t>
+              <a:t>9/4/2026</a:t>
             </a:fld>
             <a:endParaRPr lang="en-US"/>
           </a:p>
@@ -2734,7 +2734,7 @@
           <a:p>
             <a:fld id="{5BCAD085-E8A6-8845-BD4E-CB4CCA059FC4}" type="datetimeFigureOut">
               <a:rPr lang="en-US" smtClean="0"/>
-              <a:t>8/24/2026</a:t>
+              <a:t>9/4/2026</a:t>
             </a:fld>
             <a:endParaRPr lang="en-US"/>
           </a:p>
@@ -3855,7 +3855,7 @@
         <p:spPr>
           <a:xfrm>
             <a:off x="594360" y="1673352"/>
-            <a:ext cx="3383279" cy="1691640"/>
+            <a:ext cx="3383279" cy="495007"/>
           </a:xfrm>
           <a:prstGeom prst="rect">
             <a:avLst/>
@@ -3877,13 +3877,13 @@
               </a:spcAft>
             </a:pPr>
             <a:r>
-              <a:rPr sz="1200" b="0">
+              <a:rPr sz="1200" b="0" dirty="0">
                 <a:solidFill>
                   <a:srgbClr val="243447"/>
                 </a:solidFill>
                 <a:latin typeface="Calibri"/>
               </a:rPr>
-              <a:t>Turn location on before you start. Keep it on until you finish. Restated in every debrief call.</a:t>
+              <a:t>Turn location on before you start. Keep it on until you finish. </a:t>
             </a:r>
           </a:p>
         </p:txBody>
@@ -4053,7 +4053,7 @@
               </a:spcAft>
             </a:pPr>
             <a:r>
-              <a:rPr sz="1200" b="0">
+              <a:rPr sz="1200" b="0" dirty="0">
                 <a:solidFill>
                   <a:srgbClr val="243447"/>
                 </a:solidFill>
@@ -5192,7 +5192,7 @@
         <p:spPr>
           <a:xfrm>
             <a:off x="685800" y="1371600"/>
-            <a:ext cx="10881360" cy="1234440"/>
+            <a:ext cx="10881360" cy="892552"/>
           </a:xfrm>
           <a:prstGeom prst="rect">
             <a:avLst/>
@@ -5214,7 +5214,7 @@
               </a:spcAft>
             </a:pPr>
             <a:r>
-              <a:rPr sz="1500" b="0">
+              <a:rPr sz="1500" b="0" dirty="0">
                 <a:solidFill>
                   <a:srgbClr val="243447"/>
                 </a:solidFill>
@@ -5233,13 +5233,13 @@
               </a:spcAft>
             </a:pPr>
             <a:r>
-              <a:rPr sz="1500" b="0">
+              <a:rPr sz="1500" b="0" dirty="0">
                 <a:solidFill>
                   <a:srgbClr val="243447"/>
                 </a:solidFill>
                 <a:latin typeface="Calibri"/>
               </a:rPr>
-              <a:t>A completed Household form (consent + roster) or Girls form (consent + modules + reading/math) finished in under 15 minutes is not a routine timing flag. It can lead to suspension and resurvey. Same rule applies to remaining work in Torghar.</a:t>
+              <a:t>A completed Household form (consent + roster) or Girls form (consent + modules + reading/math) finished in under 15 minutes is not a routine timing flag. It can lead to suspension and resurvey. </a:t>
             </a:r>
           </a:p>
         </p:txBody>
@@ -6840,7 +6840,7 @@
               </a:spcAft>
             </a:pPr>
             <a:r>
-              <a:rPr sz="1300" b="0">
+              <a:rPr sz="1300" b="0" dirty="0">
                 <a:solidFill>
                   <a:srgbClr val="243447"/>
                 </a:solidFill>
@@ -6859,13 +6859,49 @@
               </a:spcAft>
             </a:pPr>
             <a:r>
-              <a:rPr sz="1300" b="0">
+              <a:rPr sz="1300" b="0" dirty="0">
                 <a:solidFill>
                   <a:srgbClr val="243447"/>
                 </a:solidFill>
                 <a:latin typeface="Calibri"/>
               </a:rPr>
-              <a:t>•  Test recorded but front_photo / back_photo has no file</a:t>
+              <a:t>•  Test recorded but </a:t>
+            </a:r>
+            <a:r>
+              <a:rPr sz="1300" b="0" dirty="0" err="1">
+                <a:solidFill>
+                  <a:srgbClr val="243447"/>
+                </a:solidFill>
+                <a:latin typeface="Calibri"/>
+              </a:rPr>
+              <a:t>front_photo</a:t>
+            </a:r>
+            <a:r>
+              <a:rPr sz="1300" b="0" dirty="0">
+                <a:solidFill>
+                  <a:srgbClr val="243447"/>
+                </a:solidFill>
+                <a:latin typeface="Calibri"/>
+              </a:rPr>
+              <a:t> / </a:t>
+            </a:r>
+            <a:r>
+              <a:rPr sz="1300" b="0" dirty="0" err="1">
+                <a:solidFill>
+                  <a:srgbClr val="243447"/>
+                </a:solidFill>
+                <a:latin typeface="Calibri"/>
+              </a:rPr>
+              <a:t>back_photo</a:t>
+            </a:r>
+            <a:r>
+              <a:rPr sz="1300" b="0" dirty="0">
+                <a:solidFill>
+                  <a:srgbClr val="243447"/>
+                </a:solidFill>
+                <a:latin typeface="Calibri"/>
+              </a:rPr>
+              <a:t> has no file</a:t>
             </a:r>
           </a:p>
           <a:p>
@@ -6878,13 +6914,31 @@
               </a:spcAft>
             </a:pPr>
             <a:r>
-              <a:rPr sz="1300" b="0">
+              <a:rPr sz="1300" b="0" dirty="0">
                 <a:solidFill>
                   <a:srgbClr val="243447"/>
                 </a:solidFill>
                 <a:latin typeface="Calibri"/>
               </a:rPr>
-              <a:t>•  Enumerator score / last_word / incorrect pattern far from peers</a:t>
+              <a:t>•  Enumerator score / </a:t>
+            </a:r>
+            <a:r>
+              <a:rPr sz="1300" b="0" dirty="0" err="1">
+                <a:solidFill>
+                  <a:srgbClr val="243447"/>
+                </a:solidFill>
+                <a:latin typeface="Calibri"/>
+              </a:rPr>
+              <a:t>last_word</a:t>
+            </a:r>
+            <a:r>
+              <a:rPr sz="1300" b="0" dirty="0">
+                <a:solidFill>
+                  <a:srgbClr val="243447"/>
+                </a:solidFill>
+                <a:latin typeface="Calibri"/>
+              </a:rPr>
+              <a:t> / incorrect pattern far from peers</a:t>
             </a:r>
           </a:p>
         </p:txBody>
@@ -7054,7 +7108,7 @@
               </a:spcAft>
             </a:pPr>
             <a:r>
-              <a:rPr sz="1300" b="0">
+              <a:rPr sz="1300" b="0" dirty="0">
                 <a:solidFill>
                   <a:srgbClr val="243447"/>
                 </a:solidFill>
@@ -7073,7 +7127,7 @@
               </a:spcAft>
             </a:pPr>
             <a:r>
-              <a:rPr sz="1300" b="0">
+              <a:rPr sz="1300" b="0" dirty="0">
                 <a:solidFill>
                   <a:srgbClr val="243447"/>
                 </a:solidFill>
@@ -7092,7 +7146,7 @@
               </a:spcAft>
             </a:pPr>
             <a:r>
-              <a:rPr sz="1300" b="0">
+              <a:rPr sz="1300" b="0" dirty="0">
                 <a:solidFill>
                   <a:srgbClr val="243447"/>
                 </a:solidFill>
